--- a/output/figures/Fig2B_source.pptx
+++ b/output/figures/Fig2B_source.pptx
@@ -5174,93 +5174,7 @@
           </p:nvSpPr>
           <p:spPr>
             <a:xfrm>
-              <a:off x="5243618" y="3658388"/>
-              <a:ext cx="70317" cy="129296"/>
-            </a:xfrm>
-            <a:prstGeom prst="rect">
-              <a:avLst/>
-            </a:prstGeom>
-            <a:noFill/>
-          </p:spPr>
-          <p:txBody>
-            <a:bodyPr lIns="0" rIns="0" tIns="0" bIns="0" anchorCtr="1" anchor="ctr" wrap="none"/>
-            <a:lstStyle/>
-            <a:p>
-              <a:pPr algn="l" marL="0" marR="0" indent="0">
-                <a:spcBef>
-                  <a:spcPts val="0"/>
-                </a:spcBef>
-                <a:spcAft>
-                  <a:spcPts val="0"/>
-                </a:spcAft>
-              </a:pPr>
-              <a:r>
-                <a:rPr sz="1422" i="0" b="0">
-                  <a:solidFill>
-                    <a:srgbClr val="000000">
-                      <a:alpha val="100000"/>
-                    </a:srgbClr>
-                  </a:solidFill>
-                  <a:latin typeface="Arial"/>
-                  <a:cs typeface="Arial"/>
-                </a:rPr>
-                <a:t>*</a:t>
-              </a:r>
-            </a:p>
-          </p:txBody>
-        </p:sp>
-        <p:sp>
-          <p:nvSpPr>
-            <p:cNvPr id="59" name="tx59"/>
-            <p:cNvSpPr/>
-            <p:nvPr/>
-          </p:nvSpPr>
-          <p:spPr>
-            <a:xfrm>
-              <a:off x="2496283" y="3156512"/>
-              <a:ext cx="210952" cy="129296"/>
-            </a:xfrm>
-            <a:prstGeom prst="rect">
-              <a:avLst/>
-            </a:prstGeom>
-            <a:noFill/>
-          </p:spPr>
-          <p:txBody>
-            <a:bodyPr lIns="0" rIns="0" tIns="0" bIns="0" anchorCtr="1" anchor="ctr" wrap="none"/>
-            <a:lstStyle/>
-            <a:p>
-              <a:pPr algn="l" marL="0" marR="0" indent="0">
-                <a:spcBef>
-                  <a:spcPts val="0"/>
-                </a:spcBef>
-                <a:spcAft>
-                  <a:spcPts val="0"/>
-                </a:spcAft>
-              </a:pPr>
-              <a:r>
-                <a:rPr sz="1422" i="0" b="0">
-                  <a:solidFill>
-                    <a:srgbClr val="000000">
-                      <a:alpha val="100000"/>
-                    </a:srgbClr>
-                  </a:solidFill>
-                  <a:latin typeface="Arial"/>
-                  <a:cs typeface="Arial"/>
-                </a:rPr>
-                <a:t>***</a:t>
-              </a:r>
-            </a:p>
-          </p:txBody>
-        </p:sp>
-        <p:sp>
-          <p:nvSpPr>
-            <p:cNvPr id="60" name="tx60"/>
-            <p:cNvSpPr/>
-            <p:nvPr/>
-          </p:nvSpPr>
-          <p:spPr>
-            <a:xfrm>
-              <a:off x="3245913" y="3156512"/>
+              <a:off x="5253677" y="3658388"/>
               <a:ext cx="50200" cy="129296"/>
             </a:xfrm>
             <a:prstGeom prst="rect">
@@ -5297,14 +5211,14 @@
         </p:sp>
         <p:sp>
           <p:nvSpPr>
-            <p:cNvPr id="61" name="tx61"/>
-            <p:cNvSpPr/>
-            <p:nvPr/>
-          </p:nvSpPr>
-          <p:spPr>
-            <a:xfrm>
-              <a:off x="3834792" y="3156512"/>
-              <a:ext cx="210952" cy="129296"/>
+            <p:cNvPr id="59" name="tx59"/>
+            <p:cNvSpPr/>
+            <p:nvPr/>
+          </p:nvSpPr>
+          <p:spPr>
+            <a:xfrm>
+              <a:off x="2531441" y="3156512"/>
+              <a:ext cx="140634" cy="129296"/>
             </a:xfrm>
             <a:prstGeom prst="rect">
               <a:avLst/>
@@ -5333,20 +5247,20 @@
                   <a:latin typeface="Arial"/>
                   <a:cs typeface="Arial"/>
                 </a:rPr>
-                <a:t>***</a:t>
+                <a:t>**</a:t>
               </a:r>
             </a:p>
           </p:txBody>
         </p:sp>
         <p:sp>
           <p:nvSpPr>
-            <p:cNvPr id="62" name="tx62"/>
-            <p:cNvSpPr/>
-            <p:nvPr/>
-          </p:nvSpPr>
-          <p:spPr>
-            <a:xfrm>
-              <a:off x="4584422" y="3156512"/>
+            <p:cNvPr id="60" name="tx60"/>
+            <p:cNvSpPr/>
+            <p:nvPr/>
+          </p:nvSpPr>
+          <p:spPr>
+            <a:xfrm>
+              <a:off x="3245913" y="3156512"/>
               <a:ext cx="50200" cy="129296"/>
             </a:xfrm>
             <a:prstGeom prst="rect">
@@ -5383,13 +5297,56 @@
         </p:sp>
         <p:sp>
           <p:nvSpPr>
-            <p:cNvPr id="63" name="tx63"/>
-            <p:cNvSpPr/>
-            <p:nvPr/>
-          </p:nvSpPr>
-          <p:spPr>
-            <a:xfrm>
-              <a:off x="5253677" y="3156512"/>
+            <p:cNvPr id="61" name="tx61"/>
+            <p:cNvSpPr/>
+            <p:nvPr/>
+          </p:nvSpPr>
+          <p:spPr>
+            <a:xfrm>
+              <a:off x="3869951" y="3156512"/>
+              <a:ext cx="140634" cy="129296"/>
+            </a:xfrm>
+            <a:prstGeom prst="rect">
+              <a:avLst/>
+            </a:prstGeom>
+            <a:noFill/>
+          </p:spPr>
+          <p:txBody>
+            <a:bodyPr lIns="0" rIns="0" tIns="0" bIns="0" anchorCtr="1" anchor="ctr" wrap="none"/>
+            <a:lstStyle/>
+            <a:p>
+              <a:pPr algn="l" marL="0" marR="0" indent="0">
+                <a:spcBef>
+                  <a:spcPts val="0"/>
+                </a:spcBef>
+                <a:spcAft>
+                  <a:spcPts val="0"/>
+                </a:spcAft>
+              </a:pPr>
+              <a:r>
+                <a:rPr sz="1422" i="0" b="0">
+                  <a:solidFill>
+                    <a:srgbClr val="000000">
+                      <a:alpha val="100000"/>
+                    </a:srgbClr>
+                  </a:solidFill>
+                  <a:latin typeface="Arial"/>
+                  <a:cs typeface="Arial"/>
+                </a:rPr>
+                <a:t>**</a:t>
+              </a:r>
+            </a:p>
+          </p:txBody>
+        </p:sp>
+        <p:sp>
+          <p:nvSpPr>
+            <p:cNvPr id="62" name="tx62"/>
+            <p:cNvSpPr/>
+            <p:nvPr/>
+          </p:nvSpPr>
+          <p:spPr>
+            <a:xfrm>
+              <a:off x="4584422" y="3156512"/>
               <a:ext cx="50200" cy="129296"/>
             </a:xfrm>
             <a:prstGeom prst="rect">
@@ -5426,56 +5383,13 @@
         </p:sp>
         <p:sp>
           <p:nvSpPr>
-            <p:cNvPr id="64" name="tx64"/>
-            <p:cNvSpPr/>
-            <p:nvPr/>
-          </p:nvSpPr>
-          <p:spPr>
-            <a:xfrm>
-              <a:off x="3165537" y="2654635"/>
-              <a:ext cx="210952" cy="129296"/>
-            </a:xfrm>
-            <a:prstGeom prst="rect">
-              <a:avLst/>
-            </a:prstGeom>
-            <a:noFill/>
-          </p:spPr>
-          <p:txBody>
-            <a:bodyPr lIns="0" rIns="0" tIns="0" bIns="0" anchorCtr="1" anchor="ctr" wrap="none"/>
-            <a:lstStyle/>
-            <a:p>
-              <a:pPr algn="l" marL="0" marR="0" indent="0">
-                <a:spcBef>
-                  <a:spcPts val="0"/>
-                </a:spcBef>
-                <a:spcAft>
-                  <a:spcPts val="0"/>
-                </a:spcAft>
-              </a:pPr>
-              <a:r>
-                <a:rPr sz="1422" i="0" b="0">
-                  <a:solidFill>
-                    <a:srgbClr val="000000">
-                      <a:alpha val="100000"/>
-                    </a:srgbClr>
-                  </a:solidFill>
-                  <a:latin typeface="Arial"/>
-                  <a:cs typeface="Arial"/>
-                </a:rPr>
-                <a:t>***</a:t>
-              </a:r>
-            </a:p>
-          </p:txBody>
-        </p:sp>
-        <p:sp>
-          <p:nvSpPr>
-            <p:cNvPr id="65" name="tx65"/>
-            <p:cNvSpPr/>
-            <p:nvPr/>
-          </p:nvSpPr>
-          <p:spPr>
-            <a:xfrm>
-              <a:off x="3915168" y="2654635"/>
+            <p:cNvPr id="63" name="tx63"/>
+            <p:cNvSpPr/>
+            <p:nvPr/>
+          </p:nvSpPr>
+          <p:spPr>
+            <a:xfrm>
+              <a:off x="5253677" y="3156512"/>
               <a:ext cx="50200" cy="129296"/>
             </a:xfrm>
             <a:prstGeom prst="rect">
@@ -5512,13 +5426,56 @@
         </p:sp>
         <p:sp>
           <p:nvSpPr>
-            <p:cNvPr id="66" name="tx66"/>
-            <p:cNvSpPr/>
-            <p:nvPr/>
-          </p:nvSpPr>
-          <p:spPr>
-            <a:xfrm>
-              <a:off x="4584422" y="2654635"/>
+            <p:cNvPr id="64" name="tx64"/>
+            <p:cNvSpPr/>
+            <p:nvPr/>
+          </p:nvSpPr>
+          <p:spPr>
+            <a:xfrm>
+              <a:off x="3200696" y="2654635"/>
+              <a:ext cx="140634" cy="129296"/>
+            </a:xfrm>
+            <a:prstGeom prst="rect">
+              <a:avLst/>
+            </a:prstGeom>
+            <a:noFill/>
+          </p:spPr>
+          <p:txBody>
+            <a:bodyPr lIns="0" rIns="0" tIns="0" bIns="0" anchorCtr="1" anchor="ctr" wrap="none"/>
+            <a:lstStyle/>
+            <a:p>
+              <a:pPr algn="l" marL="0" marR="0" indent="0">
+                <a:spcBef>
+                  <a:spcPts val="0"/>
+                </a:spcBef>
+                <a:spcAft>
+                  <a:spcPts val="0"/>
+                </a:spcAft>
+              </a:pPr>
+              <a:r>
+                <a:rPr sz="1422" i="0" b="0">
+                  <a:solidFill>
+                    <a:srgbClr val="000000">
+                      <a:alpha val="100000"/>
+                    </a:srgbClr>
+                  </a:solidFill>
+                  <a:latin typeface="Arial"/>
+                  <a:cs typeface="Arial"/>
+                </a:rPr>
+                <a:t>**</a:t>
+              </a:r>
+            </a:p>
+          </p:txBody>
+        </p:sp>
+        <p:sp>
+          <p:nvSpPr>
+            <p:cNvPr id="65" name="tx65"/>
+            <p:cNvSpPr/>
+            <p:nvPr/>
+          </p:nvSpPr>
+          <p:spPr>
+            <a:xfrm>
+              <a:off x="3915168" y="2654635"/>
               <a:ext cx="50200" cy="129296"/>
             </a:xfrm>
             <a:prstGeom prst="rect">
@@ -5555,13 +5512,13 @@
         </p:sp>
         <p:sp>
           <p:nvSpPr>
-            <p:cNvPr id="67" name="tx67"/>
-            <p:cNvSpPr/>
-            <p:nvPr/>
-          </p:nvSpPr>
-          <p:spPr>
-            <a:xfrm>
-              <a:off x="5253677" y="2654635"/>
+            <p:cNvPr id="66" name="tx66"/>
+            <p:cNvSpPr/>
+            <p:nvPr/>
+          </p:nvSpPr>
+          <p:spPr>
+            <a:xfrm>
+              <a:off x="4584422" y="2654635"/>
               <a:ext cx="50200" cy="129296"/>
             </a:xfrm>
             <a:prstGeom prst="rect">
@@ -5598,13 +5555,13 @@
         </p:sp>
         <p:sp>
           <p:nvSpPr>
-            <p:cNvPr id="68" name="tx68"/>
-            <p:cNvSpPr/>
-            <p:nvPr/>
-          </p:nvSpPr>
-          <p:spPr>
-            <a:xfrm>
-              <a:off x="3915168" y="2152758"/>
+            <p:cNvPr id="67" name="tx67"/>
+            <p:cNvSpPr/>
+            <p:nvPr/>
+          </p:nvSpPr>
+          <p:spPr>
+            <a:xfrm>
+              <a:off x="5253677" y="2654635"/>
               <a:ext cx="50200" cy="129296"/>
             </a:xfrm>
             <a:prstGeom prst="rect">
@@ -5641,13 +5598,13 @@
         </p:sp>
         <p:sp>
           <p:nvSpPr>
-            <p:cNvPr id="69" name="tx69"/>
-            <p:cNvSpPr/>
-            <p:nvPr/>
-          </p:nvSpPr>
-          <p:spPr>
-            <a:xfrm>
-              <a:off x="4584422" y="2152758"/>
+            <p:cNvPr id="68" name="tx68"/>
+            <p:cNvSpPr/>
+            <p:nvPr/>
+          </p:nvSpPr>
+          <p:spPr>
+            <a:xfrm>
+              <a:off x="3915168" y="2152758"/>
               <a:ext cx="50200" cy="129296"/>
             </a:xfrm>
             <a:prstGeom prst="rect">
@@ -5684,13 +5641,13 @@
         </p:sp>
         <p:sp>
           <p:nvSpPr>
-            <p:cNvPr id="70" name="tx70"/>
-            <p:cNvSpPr/>
-            <p:nvPr/>
-          </p:nvSpPr>
-          <p:spPr>
-            <a:xfrm>
-              <a:off x="5253677" y="2152758"/>
+            <p:cNvPr id="69" name="tx69"/>
+            <p:cNvSpPr/>
+            <p:nvPr/>
+          </p:nvSpPr>
+          <p:spPr>
+            <a:xfrm>
+              <a:off x="4584422" y="2152758"/>
               <a:ext cx="50200" cy="129296"/>
             </a:xfrm>
             <a:prstGeom prst="rect">
@@ -5727,13 +5684,13 @@
         </p:sp>
         <p:sp>
           <p:nvSpPr>
-            <p:cNvPr id="71" name="tx71"/>
-            <p:cNvSpPr/>
-            <p:nvPr/>
-          </p:nvSpPr>
-          <p:spPr>
-            <a:xfrm>
-              <a:off x="4584422" y="1650882"/>
+            <p:cNvPr id="70" name="tx70"/>
+            <p:cNvSpPr/>
+            <p:nvPr/>
+          </p:nvSpPr>
+          <p:spPr>
+            <a:xfrm>
+              <a:off x="5253677" y="2152758"/>
               <a:ext cx="50200" cy="129296"/>
             </a:xfrm>
             <a:prstGeom prst="rect">
@@ -5770,13 +5727,13 @@
         </p:sp>
         <p:sp>
           <p:nvSpPr>
-            <p:cNvPr id="72" name="tx72"/>
-            <p:cNvSpPr/>
-            <p:nvPr/>
-          </p:nvSpPr>
-          <p:spPr>
-            <a:xfrm>
-              <a:off x="5253677" y="1650882"/>
+            <p:cNvPr id="71" name="tx71"/>
+            <p:cNvSpPr/>
+            <p:nvPr/>
+          </p:nvSpPr>
+          <p:spPr>
+            <a:xfrm>
+              <a:off x="4584422" y="1650882"/>
               <a:ext cx="50200" cy="129296"/>
             </a:xfrm>
             <a:prstGeom prst="rect">
@@ -5813,14 +5770,14 @@
         </p:sp>
         <p:sp>
           <p:nvSpPr>
-            <p:cNvPr id="73" name="tx73"/>
-            <p:cNvSpPr/>
-            <p:nvPr/>
-          </p:nvSpPr>
-          <p:spPr>
-            <a:xfrm>
-              <a:off x="5173301" y="1149005"/>
-              <a:ext cx="210952" cy="129296"/>
+            <p:cNvPr id="72" name="tx72"/>
+            <p:cNvSpPr/>
+            <p:nvPr/>
+          </p:nvSpPr>
+          <p:spPr>
+            <a:xfrm>
+              <a:off x="5253677" y="1650882"/>
+              <a:ext cx="50200" cy="129296"/>
             </a:xfrm>
             <a:prstGeom prst="rect">
               <a:avLst/>
@@ -5849,7 +5806,50 @@
                   <a:latin typeface="Arial"/>
                   <a:cs typeface="Arial"/>
                 </a:rPr>
-                <a:t>***</a:t>
+                <a:t> </a:t>
+              </a:r>
+            </a:p>
+          </p:txBody>
+        </p:sp>
+        <p:sp>
+          <p:nvSpPr>
+            <p:cNvPr id="73" name="tx73"/>
+            <p:cNvSpPr/>
+            <p:nvPr/>
+          </p:nvSpPr>
+          <p:spPr>
+            <a:xfrm>
+              <a:off x="5208460" y="1149005"/>
+              <a:ext cx="140634" cy="129296"/>
+            </a:xfrm>
+            <a:prstGeom prst="rect">
+              <a:avLst/>
+            </a:prstGeom>
+            <a:noFill/>
+          </p:spPr>
+          <p:txBody>
+            <a:bodyPr lIns="0" rIns="0" tIns="0" bIns="0" anchorCtr="1" anchor="ctr" wrap="none"/>
+            <a:lstStyle/>
+            <a:p>
+              <a:pPr algn="l" marL="0" marR="0" indent="0">
+                <a:spcBef>
+                  <a:spcPts val="0"/>
+                </a:spcBef>
+                <a:spcAft>
+                  <a:spcPts val="0"/>
+                </a:spcAft>
+              </a:pPr>
+              <a:r>
+                <a:rPr sz="1422" i="0" b="0">
+                  <a:solidFill>
+                    <a:srgbClr val="000000">
+                      <a:alpha val="100000"/>
+                    </a:srgbClr>
+                  </a:solidFill>
+                  <a:latin typeface="Arial"/>
+                  <a:cs typeface="Arial"/>
+                </a:rPr>
+                <a:t>**</a:t>
               </a:r>
             </a:p>
           </p:txBody>
